--- a/media/exports/reports/2026-01/growth-services.pptx
+++ b/media/exports/reports/2026-01/growth-services.pptx
@@ -222,52 +222,52 @@
                 <c:formatCode>$#,##0;[Red]($#,##0);"-"</c:formatCode>
                 <c:ptCount val="16"/>
                 <c:pt idx="0">
-                  <c:v>94520</c:v>
+                  <c:v>103550</c:v>
                 </c:pt>
                 <c:pt idx="1">
-                  <c:v>108140</c:v>
+                  <c:v>118390</c:v>
                 </c:pt>
                 <c:pt idx="2">
-                  <c:v>114895</c:v>
+                  <c:v>125715</c:v>
                 </c:pt>
                 <c:pt idx="3">
-                  <c:v>88250</c:v>
+                  <c:v>96560</c:v>
                 </c:pt>
                 <c:pt idx="4">
-                  <c:v>111010</c:v>
+                  <c:v>121275</c:v>
                 </c:pt>
                 <c:pt idx="5">
-                  <c:v>77175</c:v>
+                  <c:v>84340</c:v>
                 </c:pt>
                 <c:pt idx="6">
-                  <c:v>63970</c:v>
+                  <c:v>69985</c:v>
                 </c:pt>
                 <c:pt idx="7">
-                  <c:v>95555</c:v>
+                  <c:v>104970</c:v>
                 </c:pt>
                 <c:pt idx="8">
-                  <c:v>90220</c:v>
+                  <c:v>99060</c:v>
                 </c:pt>
                 <c:pt idx="9">
-                  <c:v>86320</c:v>
+                  <c:v>94805</c:v>
                 </c:pt>
                 <c:pt idx="10">
-                  <c:v>61475</c:v>
+                  <c:v>67745</c:v>
                 </c:pt>
                 <c:pt idx="11">
-                  <c:v>59535</c:v>
+                  <c:v>65650</c:v>
                 </c:pt>
                 <c:pt idx="12">
-                  <c:v>71260</c:v>
+                  <c:v>78550</c:v>
                 </c:pt>
                 <c:pt idx="13">
-                  <c:v>83940</c:v>
+                  <c:v>92575</c:v>
                 </c:pt>
                 <c:pt idx="14">
-                  <c:v>69420</c:v>
+                  <c:v>76600</c:v>
                 </c:pt>
                 <c:pt idx="15">
-                  <c:v>92370</c:v>
+                  <c:v>102350</c:v>
                 </c:pt>
               </c:numCache>
             </c:numRef>
@@ -316,7 +316,7 @@
         <c:axId val="-2100718248"/>
         <c:scaling>
           <c:orientation val="minMax"/>
-          <c:max val="125000.0"/>
+          <c:max val="150000.0"/>
           <c:min val="0.0"/>
         </c:scaling>
         <c:delete val="0"/>
@@ -351,7 +351,7 @@
         <c:crossAx val="-2101159928"/>
         <c:crosses val="autoZero"/>
         <c:crossBetween val="midCat"/>
-        <c:majorUnit val="25000.0"/>
+        <c:majorUnit val="50000.0"/>
       </c:valAx>
     </c:plotArea>
     <c:plotVisOnly val="1"/>
@@ -486,52 +486,52 @@
                 <c:formatCode>$#,##0;[Red]($#,##0);"-"</c:formatCode>
                 <c:ptCount val="16"/>
                 <c:pt idx="0">
-                  <c:v>70720</c:v>
+                  <c:v>77350</c:v>
                 </c:pt>
                 <c:pt idx="1">
-                  <c:v>88540</c:v>
+                  <c:v>96790</c:v>
                 </c:pt>
                 <c:pt idx="2">
-                  <c:v>94695</c:v>
+                  <c:v>103515</c:v>
                 </c:pt>
                 <c:pt idx="3">
-                  <c:v>66850</c:v>
+                  <c:v>73060</c:v>
                 </c:pt>
                 <c:pt idx="4">
-                  <c:v>84410</c:v>
+                  <c:v>92075</c:v>
                 </c:pt>
                 <c:pt idx="5">
-                  <c:v>48975</c:v>
+                  <c:v>53340</c:v>
                 </c:pt>
                 <c:pt idx="6">
-                  <c:v>37570</c:v>
+                  <c:v>40885</c:v>
                 </c:pt>
                 <c:pt idx="7">
-                  <c:v>59755</c:v>
+                  <c:v>65570</c:v>
                 </c:pt>
                 <c:pt idx="8">
-                  <c:v>64520</c:v>
+                  <c:v>70760</c:v>
                 </c:pt>
                 <c:pt idx="9">
-                  <c:v>64820</c:v>
+                  <c:v>71205</c:v>
                 </c:pt>
                 <c:pt idx="10">
-                  <c:v>38775</c:v>
+                  <c:v>42845</c:v>
                 </c:pt>
                 <c:pt idx="11">
-                  <c:v>38035</c:v>
+                  <c:v>42050</c:v>
                 </c:pt>
                 <c:pt idx="12">
-                  <c:v>45860</c:v>
+                  <c:v>50650</c:v>
                 </c:pt>
                 <c:pt idx="13">
-                  <c:v>46840</c:v>
+                  <c:v>51775</c:v>
                 </c:pt>
                 <c:pt idx="14">
-                  <c:v>29520</c:v>
+                  <c:v>32800</c:v>
                 </c:pt>
                 <c:pt idx="15">
-                  <c:v>60170</c:v>
+                  <c:v>66950</c:v>
                 </c:pt>
               </c:numCache>
             </c:numRef>
@@ -580,7 +580,7 @@
         <c:axId val="-2100718248"/>
         <c:scaling>
           <c:orientation val="minMax"/>
-          <c:max val="100000.0"/>
+          <c:max val="125000.0"/>
           <c:min val="0.0"/>
         </c:scaling>
         <c:delete val="0"/>
@@ -615,7 +615,7 @@
         <c:crossAx val="-2101159928"/>
         <c:crosses val="autoZero"/>
         <c:crossBetween val="midCat"/>
-        <c:majorUnit val="20000.0"/>
+        <c:majorUnit val="25000.0"/>
       </c:valAx>
     </c:plotArea>
     <c:plotVisOnly val="1"/>
@@ -750,52 +750,52 @@
                 <c:formatCode>$#,##0;[Red]($#,##0);"-"</c:formatCode>
                 <c:ptCount val="16"/>
                 <c:pt idx="0">
-                  <c:v>15000</c:v>
+                  <c:v>16500</c:v>
                 </c:pt>
                 <c:pt idx="1">
-                  <c:v>15000</c:v>
+                  <c:v>16500</c:v>
                 </c:pt>
                 <c:pt idx="2">
-                  <c:v>15000</c:v>
+                  <c:v>16500</c:v>
                 </c:pt>
                 <c:pt idx="3">
-                  <c:v>15000</c:v>
+                  <c:v>16500</c:v>
                 </c:pt>
                 <c:pt idx="4">
-                  <c:v>15000</c:v>
+                  <c:v>16500</c:v>
                 </c:pt>
                 <c:pt idx="5">
-                  <c:v>21800</c:v>
+                  <c:v>24000</c:v>
                 </c:pt>
                 <c:pt idx="6">
-                  <c:v>21800</c:v>
+                  <c:v>24000</c:v>
                 </c:pt>
                 <c:pt idx="7">
-                  <c:v>21800</c:v>
+                  <c:v>24000</c:v>
                 </c:pt>
                 <c:pt idx="8">
-                  <c:v>21800</c:v>
+                  <c:v>24000</c:v>
                 </c:pt>
                 <c:pt idx="9">
-                  <c:v>16300</c:v>
+                  <c:v>17900</c:v>
                 </c:pt>
                 <c:pt idx="10">
-                  <c:v>16300</c:v>
+                  <c:v>17900</c:v>
                 </c:pt>
                 <c:pt idx="11">
-                  <c:v>16300</c:v>
+                  <c:v>17900</c:v>
                 </c:pt>
                 <c:pt idx="12">
-                  <c:v>16300</c:v>
+                  <c:v>17900</c:v>
                 </c:pt>
                 <c:pt idx="13">
-                  <c:v>28300</c:v>
+                  <c:v>31100</c:v>
                 </c:pt>
                 <c:pt idx="14">
-                  <c:v>28300</c:v>
+                  <c:v>31100</c:v>
                 </c:pt>
                 <c:pt idx="15">
-                  <c:v>28300</c:v>
+                  <c:v>31100</c:v>
                 </c:pt>
               </c:numCache>
             </c:numRef>
@@ -844,7 +844,7 @@
         <c:axId val="-2100718248"/>
         <c:scaling>
           <c:orientation val="minMax"/>
-          <c:max val="30000.0"/>
+          <c:max val="40000.0"/>
           <c:min val="0.0"/>
         </c:scaling>
         <c:delete val="0"/>
@@ -1014,52 +1014,52 @@
                 <c:formatCode>$#,##0;[Red]($#,##0);"-"</c:formatCode>
                 <c:ptCount val="16"/>
                 <c:pt idx="0">
-                  <c:v>8800</c:v>
+                  <c:v>9700</c:v>
                 </c:pt>
                 <c:pt idx="1">
-                  <c:v>4600</c:v>
+                  <c:v>5100</c:v>
                 </c:pt>
                 <c:pt idx="2">
-                  <c:v>5200</c:v>
+                  <c:v>5700</c:v>
                 </c:pt>
                 <c:pt idx="3">
-                  <c:v>6400</c:v>
+                  <c:v>7000</c:v>
                 </c:pt>
                 <c:pt idx="4">
-                  <c:v>11600</c:v>
+                  <c:v>12700</c:v>
                 </c:pt>
                 <c:pt idx="5">
-                  <c:v>6400</c:v>
+                  <c:v>7000</c:v>
                 </c:pt>
                 <c:pt idx="6">
-                  <c:v>4600</c:v>
+                  <c:v>5100</c:v>
                 </c:pt>
                 <c:pt idx="7">
-                  <c:v>14000</c:v>
+                  <c:v>15400</c:v>
                 </c:pt>
                 <c:pt idx="8">
-                  <c:v>3900</c:v>
+                  <c:v>4300</c:v>
                 </c:pt>
                 <c:pt idx="9">
-                  <c:v>5200</c:v>
+                  <c:v>5700</c:v>
                 </c:pt>
                 <c:pt idx="10">
-                  <c:v>6400</c:v>
+                  <c:v>7000</c:v>
                 </c:pt>
                 <c:pt idx="11">
-                  <c:v>5200</c:v>
+                  <c:v>5700</c:v>
                 </c:pt>
                 <c:pt idx="12">
-                  <c:v>9100</c:v>
+                  <c:v>10000</c:v>
                 </c:pt>
                 <c:pt idx="13">
-                  <c:v>8800</c:v>
+                  <c:v>9700</c:v>
                 </c:pt>
                 <c:pt idx="14">
-                  <c:v>11600</c:v>
+                  <c:v>12700</c:v>
                 </c:pt>
                 <c:pt idx="15">
-                  <c:v>3900</c:v>
+                  <c:v>4300</c:v>
                 </c:pt>
               </c:numCache>
             </c:numRef>
@@ -1108,7 +1108,7 @@
         <c:axId val="-2100718248"/>
         <c:scaling>
           <c:orientation val="minMax"/>
-          <c:max val="15000.0"/>
+          <c:max val="20000.0"/>
           <c:min val="0.0"/>
         </c:scaling>
         <c:delete val="0"/>
@@ -1633,7 +1633,7 @@
           <a:lstStyle/>
           <a:p>
             <a:r>
-              <a:t>Services · All. January against January last year: 4.7%; Year to date (Jul to Jan 2026): $524,320; Gross margin, year to date: 64.1%. Revenue is $524,320 this financial year to date (Jul to Jan 2026). Training makes the highest gross margin (75.7%); Projects the lowest (61.3%). The business needs 64.6% gross margin just to cover overheads. Projects: 61.3% gross margin, 21.3 points over the 40.0% target ($69,112 ahead on $324,020 this financial year to date). Training: 75.7% gross margin, 35.7 points over the 40.0% target ($17,940 ahead on $50,200 this financial year to date).</a:t>
+              <a:t>Services · All. January against January last year: 6.0%; Year to date (Jul to Jan 2026): $578,275; Gross margin, year to date: 67.5%. Revenue is $578,275 this financial year to date (Jul to Jan 2026). Training makes the highest gross margin (77.9%); Projects the lowest (65.0%). The business needs 65.0% gross margin just to cover overheads. Projects: 65.0% gross margin, 25.0 points over the 40.0% target ($89,665 ahead on $358,275 this financial year to date). Training: 77.9% gross margin, 37.9 points over the 40.0% target ($20,880 ahead on $55,100 this financial year to date).</a:t>
             </a:r>
           </a:p>
         </p:txBody>
@@ -1703,7 +1703,7 @@
           <a:lstStyle/>
           <a:p>
             <a:r>
-              <a:t>Services · Projects. January against January last year: (10.0%); Year to date (Jul to Jan 2026): $324,020; Gross margin, year to date: 61.3%. Projects brought in $324,020 this financial year to date, at a 61.3% gross margin (below the 64.1% overall). Projects: 61.3% gross margin, 21.3 points over the 40.0% target ($69,112 ahead on $324,020 this financial year to date).</a:t>
+              <a:t>Services · Projects. January against January last year: (8.4%); Year to date (Jul to Jan 2026): $358,275; Gross margin, year to date: 65.0%. Projects brought in $358,275 this financial year to date, at a 65.0% gross margin (below the 67.5% overall). Projects: 65.0% gross margin, 25.0 points over the 40.0% target ($89,665 ahead on $358,275 this financial year to date).</a:t>
             </a:r>
           </a:p>
         </p:txBody>
@@ -1773,7 +1773,7 @@
           <a:lstStyle/>
           <a:p>
             <a:r>
-              <a:t>Services · Retainers. January against January last year: 88.7%; Year to date (Jul to Jan 2026): $150,100; Gross margin, year to date: 66.2%. Retainers brought in $150,100 this financial year to date, at a 66.2% gross margin (above the 64.1% overall). Retainers: 66.2% gross margin, 26.2 points over the 40.0% target ($39,360 ahead on $150,100 this financial year to date).</a:t>
+              <a:t>Services · Retainers. January against January last year: 88.5%; Year to date (Jul to Jan 2026): $164,900; Gross margin, year to date: 69.3%. Retainers brought in $164,900 this financial year to date, at a 69.3% gross margin (above the 67.5% overall). Retainers: 69.3% gross margin, 29.3 points over the 40.0% target ($48,240 ahead on $164,900 this financial year to date).</a:t>
             </a:r>
           </a:p>
         </p:txBody>
@@ -1843,7 +1843,7 @@
           <a:lstStyle/>
           <a:p>
             <a:r>
-              <a:t>Services · Training. January against January last year: (39.1%); Year to date (Jul to Jan 2026): $50,200; Gross margin, year to date: 75.7%. Training brought in $50,200 this financial year to date, at a 75.7% gross margin (above the 64.1% overall). Training: 75.7% gross margin, 35.7 points over the 40.0% target ($17,940 ahead on $50,200 this financial year to date).</a:t>
+              <a:t>Services · Training. January against January last year: (38.6%); Year to date (Jul to Jan 2026): $55,100; Gross margin, year to date: 77.9%. Training brought in $55,100 this financial year to date, at a 77.9% gross margin (above the 67.5% overall). Training: 77.9% gross margin, 37.9 points over the 40.0% target ($20,880 ahead on $55,100 this financial year to date).</a:t>
             </a:r>
           </a:p>
         </p:txBody>
@@ -1913,7 +1913,7 @@
           <a:lstStyle/>
           <a:p>
             <a:r>
-              <a:t>By type of work: financial year to date (Jul to Jan 2026) against the same period last year · Services. Same period last year: Not available: the data starts October 2024. From gross margin to profit: January's client work made $59,850 gross margin (64.8%). Consultant time not charged to client work took $8,330 and overheads $51,360, leaving $160 profit before tax (0.2% of revenue). To cover overheads, client work needs a 64.6% gross margin on average.</a:t>
+              <a:t>By type of work: financial year to date (Jul to Jan 2026) against the same period last year · Services. Same period last year: Not available: the data starts October 2024. From gross margin to profit: January's client work made $69,830 gross margin (68.2%). Consultant time not charged to client work took $15,180 and overheads $51,360, leaving $3,290 profit before tax (3.2% of revenue). To cover overheads, client work needs a 65.0% gross margin on average.</a:t>
             </a:r>
           </a:p>
         </p:txBody>
@@ -5328,7 +5328,7 @@
                 </a:solidFill>
                 <a:latin typeface="Roboto"/>
               </a:rPr>
-              <a:t>Data retrieved 2pm, Tue 6 Oct 2026 · Generated 8 Oct 2026, 9:35am · Sample data · Made with Python (python-pptx)</a:t>
+              <a:t>Data retrieved 2pm, Tue 6 Oct 2026 · Generated 9 Oct 2026, 8:41am · Sample data · Made with Python (python-pptx)</a:t>
             </a:r>
           </a:p>
         </p:txBody>
@@ -5674,7 +5674,7 @@
                 </a:solidFill>
                 <a:latin typeface="Roboto"/>
               </a:rPr>
-              <a:t>4.7%</a:t>
+              <a:t>6.0%</a:t>
             </a:r>
           </a:p>
         </p:txBody>
@@ -5713,7 +5713,7 @@
                 </a:solidFill>
                 <a:latin typeface="Roboto"/>
               </a:rPr>
-              <a:t>$92,370 against $88,250</a:t>
+              <a:t>$102,350 against $96,560</a:t>
             </a:r>
           </a:p>
         </p:txBody>
@@ -5840,7 +5840,7 @@
                 </a:solidFill>
                 <a:latin typeface="Roboto"/>
               </a:rPr>
-              <a:t>$524,320</a:t>
+              <a:t>$578,275</a:t>
             </a:r>
           </a:p>
         </p:txBody>
@@ -6006,7 +6006,7 @@
                 </a:solidFill>
                 <a:latin typeface="Roboto"/>
               </a:rPr>
-              <a:t>64.1%</a:t>
+              <a:t>67.5%</a:t>
             </a:r>
           </a:p>
         </p:txBody>
@@ -6045,7 +6045,7 @@
                 </a:solidFill>
                 <a:latin typeface="Roboto"/>
               </a:rPr>
-              <a:t>$336,140 before overheads</a:t>
+              <a:t>$390,095 before overheads</a:t>
             </a:r>
           </a:p>
         </p:txBody>
@@ -6190,7 +6190,7 @@
                 </a:solidFill>
                 <a:latin typeface="Roboto"/>
               </a:rPr>
-              <a:t>Revenue is $524,320 this financial year to date (Jul to Jan 2026). Training makes the highest gross margin (75.7%); Projects the lowest (61.3%). The business needs 64.6% gross margin just to cover overheads.</a:t>
+              <a:t>Revenue is $578,275 this financial year to date (Jul to Jan 2026). Training makes the highest gross margin (77.9%); Projects the lowest (65.0%). The business needs 65.0% gross margin just to cover overheads.</a:t>
             </a:r>
           </a:p>
         </p:txBody>
@@ -6317,7 +6317,7 @@
                 </a:solidFill>
                 <a:latin typeface="Roboto"/>
               </a:rPr>
-              <a:t>Projects: 61.3% gross margin, 21.3 points over the 40.0% target ($69,112 ahead on $324,020 this financial year to date). Training: 75.7% gross margin, 35.7 points over the 40.0% target ($17,940 ahead on $50,200 this financial year to date).</a:t>
+              <a:t>Projects: 65.0% gross margin, 25.0 points over the 40.0% target ($89,665 ahead on $358,275 this financial year to date). Training: 77.9% gross margin, 37.9 points over the 40.0% target ($20,880 ahead on $55,100 this financial year to date).</a:t>
             </a:r>
           </a:p>
         </p:txBody>
@@ -6395,7 +6395,7 @@
                 </a:solidFill>
                 <a:latin typeface="Roboto"/>
               </a:rPr>
-              <a:t>Data retrieved 2pm, Tue 6 Oct 2026 · Generated 8 Oct 2026, 9:35am · Sample data · Made with Python (python-pptx)</a:t>
+              <a:t>Data retrieved 2pm, Tue 6 Oct 2026 · Generated 9 Oct 2026, 8:41am · Sample data · Made with Python (python-pptx)</a:t>
             </a:r>
           </a:p>
         </p:txBody>
@@ -6741,7 +6741,7 @@
                 </a:solidFill>
                 <a:latin typeface="Roboto"/>
               </a:rPr>
-              <a:t>(10.0%)</a:t>
+              <a:t>(8.4%)</a:t>
             </a:r>
           </a:p>
         </p:txBody>
@@ -6780,7 +6780,7 @@
                 </a:solidFill>
                 <a:latin typeface="Roboto"/>
               </a:rPr>
-              <a:t>$60,170 against $66,850</a:t>
+              <a:t>$66,950 against $73,060</a:t>
             </a:r>
           </a:p>
         </p:txBody>
@@ -6907,7 +6907,7 @@
                 </a:solidFill>
                 <a:latin typeface="Roboto"/>
               </a:rPr>
-              <a:t>$324,020</a:t>
+              <a:t>$358,275</a:t>
             </a:r>
           </a:p>
         </p:txBody>
@@ -7073,7 +7073,7 @@
                 </a:solidFill>
                 <a:latin typeface="Roboto"/>
               </a:rPr>
-              <a:t>61.3%</a:t>
+              <a:t>65.0%</a:t>
             </a:r>
           </a:p>
         </p:txBody>
@@ -7112,7 +7112,7 @@
                 </a:solidFill>
                 <a:latin typeface="Roboto"/>
               </a:rPr>
-              <a:t>$198,720 before overheads</a:t>
+              <a:t>$232,975 before overheads</a:t>
             </a:r>
           </a:p>
         </p:txBody>
@@ -7257,7 +7257,7 @@
                 </a:solidFill>
                 <a:latin typeface="Roboto"/>
               </a:rPr>
-              <a:t>Projects brought in $324,020 this financial year to date, at a 61.3% gross margin (below the 64.1% overall).</a:t>
+              <a:t>Projects brought in $358,275 this financial year to date, at a 65.0% gross margin (below the 67.5% overall).</a:t>
             </a:r>
           </a:p>
         </p:txBody>
@@ -7384,7 +7384,7 @@
                 </a:solidFill>
                 <a:latin typeface="Roboto"/>
               </a:rPr>
-              <a:t>Projects: 61.3% gross margin, 21.3 points over the 40.0% target ($69,112 ahead on $324,020 this financial year to date).</a:t>
+              <a:t>Projects: 65.0% gross margin, 25.0 points over the 40.0% target ($89,665 ahead on $358,275 this financial year to date).</a:t>
             </a:r>
           </a:p>
         </p:txBody>
@@ -7462,7 +7462,7 @@
                 </a:solidFill>
                 <a:latin typeface="Roboto"/>
               </a:rPr>
-              <a:t>Data retrieved 2pm, Tue 6 Oct 2026 · Generated 8 Oct 2026, 9:35am · Sample data · Made with Python (python-pptx)</a:t>
+              <a:t>Data retrieved 2pm, Tue 6 Oct 2026 · Generated 9 Oct 2026, 8:41am · Sample data · Made with Python (python-pptx)</a:t>
             </a:r>
           </a:p>
         </p:txBody>
@@ -7808,7 +7808,7 @@
                 </a:solidFill>
                 <a:latin typeface="Roboto"/>
               </a:rPr>
-              <a:t>88.7%</a:t>
+              <a:t>88.5%</a:t>
             </a:r>
           </a:p>
         </p:txBody>
@@ -7847,7 +7847,7 @@
                 </a:solidFill>
                 <a:latin typeface="Roboto"/>
               </a:rPr>
-              <a:t>$28,300 against $15,000</a:t>
+              <a:t>$31,100 against $16,500</a:t>
             </a:r>
           </a:p>
         </p:txBody>
@@ -7974,7 +7974,7 @@
                 </a:solidFill>
                 <a:latin typeface="Roboto"/>
               </a:rPr>
-              <a:t>$150,100</a:t>
+              <a:t>$164,900</a:t>
             </a:r>
           </a:p>
         </p:txBody>
@@ -8140,7 +8140,7 @@
                 </a:solidFill>
                 <a:latin typeface="Roboto"/>
               </a:rPr>
-              <a:t>66.2%</a:t>
+              <a:t>69.3%</a:t>
             </a:r>
           </a:p>
         </p:txBody>
@@ -8179,7 +8179,7 @@
                 </a:solidFill>
                 <a:latin typeface="Roboto"/>
               </a:rPr>
-              <a:t>$99,400 before overheads</a:t>
+              <a:t>$114,200 before overheads</a:t>
             </a:r>
           </a:p>
         </p:txBody>
@@ -8324,7 +8324,7 @@
                 </a:solidFill>
                 <a:latin typeface="Roboto"/>
               </a:rPr>
-              <a:t>Retainers brought in $150,100 this financial year to date, at a 66.2% gross margin (above the 64.1% overall).</a:t>
+              <a:t>Retainers brought in $164,900 this financial year to date, at a 69.3% gross margin (above the 67.5% overall).</a:t>
             </a:r>
           </a:p>
         </p:txBody>
@@ -8451,7 +8451,7 @@
                 </a:solidFill>
                 <a:latin typeface="Roboto"/>
               </a:rPr>
-              <a:t>Retainers: 66.2% gross margin, 26.2 points over the 40.0% target ($39,360 ahead on $150,100 this financial year to date).</a:t>
+              <a:t>Retainers: 69.3% gross margin, 29.3 points over the 40.0% target ($48,240 ahead on $164,900 this financial year to date).</a:t>
             </a:r>
           </a:p>
         </p:txBody>
@@ -8529,7 +8529,7 @@
                 </a:solidFill>
                 <a:latin typeface="Roboto"/>
               </a:rPr>
-              <a:t>Data retrieved 2pm, Tue 6 Oct 2026 · Generated 8 Oct 2026, 9:35am · Sample data · Made with Python (python-pptx)</a:t>
+              <a:t>Data retrieved 2pm, Tue 6 Oct 2026 · Generated 9 Oct 2026, 8:41am · Sample data · Made with Python (python-pptx)</a:t>
             </a:r>
           </a:p>
         </p:txBody>
@@ -8875,7 +8875,7 @@
                 </a:solidFill>
                 <a:latin typeface="Roboto"/>
               </a:rPr>
-              <a:t>(39.1%)</a:t>
+              <a:t>(38.6%)</a:t>
             </a:r>
           </a:p>
         </p:txBody>
@@ -8914,7 +8914,7 @@
                 </a:solidFill>
                 <a:latin typeface="Roboto"/>
               </a:rPr>
-              <a:t>$3,900 against $6,400</a:t>
+              <a:t>$4,300 against $7,000</a:t>
             </a:r>
           </a:p>
         </p:txBody>
@@ -9041,7 +9041,7 @@
                 </a:solidFill>
                 <a:latin typeface="Roboto"/>
               </a:rPr>
-              <a:t>$50,200</a:t>
+              <a:t>$55,100</a:t>
             </a:r>
           </a:p>
         </p:txBody>
@@ -9207,7 +9207,7 @@
                 </a:solidFill>
                 <a:latin typeface="Roboto"/>
               </a:rPr>
-              <a:t>75.7%</a:t>
+              <a:t>77.9%</a:t>
             </a:r>
           </a:p>
         </p:txBody>
@@ -9246,7 +9246,7 @@
                 </a:solidFill>
                 <a:latin typeface="Roboto"/>
               </a:rPr>
-              <a:t>$38,020 before overheads</a:t>
+              <a:t>$42,920 before overheads</a:t>
             </a:r>
           </a:p>
         </p:txBody>
@@ -9391,7 +9391,7 @@
                 </a:solidFill>
                 <a:latin typeface="Roboto"/>
               </a:rPr>
-              <a:t>Training brought in $50,200 this financial year to date, at a 75.7% gross margin (above the 64.1% overall).</a:t>
+              <a:t>Training brought in $55,100 this financial year to date, at a 77.9% gross margin (above the 67.5% overall).</a:t>
             </a:r>
           </a:p>
         </p:txBody>
@@ -9518,7 +9518,7 @@
                 </a:solidFill>
                 <a:latin typeface="Roboto"/>
               </a:rPr>
-              <a:t>Training: 75.7% gross margin, 35.7 points over the 40.0% target ($17,940 ahead on $50,200 this financial year to date).</a:t>
+              <a:t>Training: 77.9% gross margin, 37.9 points over the 40.0% target ($20,880 ahead on $55,100 this financial year to date).</a:t>
             </a:r>
           </a:p>
         </p:txBody>
@@ -9596,7 +9596,7 @@
                 </a:solidFill>
                 <a:latin typeface="Roboto"/>
               </a:rPr>
-              <a:t>Data retrieved 2pm, Tue 6 Oct 2026 · Generated 8 Oct 2026, 9:35am · Sample data · Made with Python (python-pptx)</a:t>
+              <a:t>Data retrieved 2pm, Tue 6 Oct 2026 · Generated 9 Oct 2026, 8:41am · Sample data · Made with Python (python-pptx)</a:t>
             </a:r>
           </a:p>
         </p:txBody>
@@ -9815,7 +9815,7 @@
                 </a:solidFill>
                 <a:latin typeface="Roboto"/>
               </a:rPr>
-              <a:t>Same period last year: Not available: the data starts October 2024. From gross margin to profit: January's client work made $59,850 gross margin (64.8%). Consultant time not charged to client work took $8,330 and overheads $51,360, leaving $160 profit before tax (0.2% of revenue). To cover overheads, client work needs a 64.6% gross margin on average.</a:t>
+              <a:t>Same period last year: Not available: the data starts October 2024. From gross margin to profit: January's client work made $69,830 gross margin (68.2%). Consultant time not charged to client work took $15,180 and overheads $51,360, leaving $3,290 profit before tax (3.2% of revenue). To cover overheads, client work needs a 65.0% gross margin on average.</a:t>
             </a:r>
           </a:p>
         </p:txBody>
@@ -10046,7 +10046,7 @@
                           </a:solidFill>
                           <a:latin typeface="Roboto"/>
                         </a:rPr>
-                        <a:t>$324,020</a:t>
+                        <a:t>$358,275</a:t>
                       </a:r>
                     </a:p>
                   </a:txBody>
@@ -10127,7 +10127,7 @@
                           </a:solidFill>
                           <a:latin typeface="Roboto"/>
                         </a:rPr>
-                        <a:t>$198,720</a:t>
+                        <a:t>$232,975</a:t>
                       </a:r>
                     </a:p>
                   </a:txBody>
@@ -10154,7 +10154,7 @@
                           </a:solidFill>
                           <a:latin typeface="Roboto"/>
                         </a:rPr>
-                        <a:t>61.3%</a:t>
+                        <a:t>65.0%</a:t>
                       </a:r>
                     </a:p>
                   </a:txBody>
@@ -10210,7 +10210,7 @@
                           </a:solidFill>
                           <a:latin typeface="Roboto"/>
                         </a:rPr>
-                        <a:t>$150,100</a:t>
+                        <a:t>$164,900</a:t>
                       </a:r>
                     </a:p>
                   </a:txBody>
@@ -10291,7 +10291,7 @@
                           </a:solidFill>
                           <a:latin typeface="Roboto"/>
                         </a:rPr>
-                        <a:t>$99,400</a:t>
+                        <a:t>$114,200</a:t>
                       </a:r>
                     </a:p>
                   </a:txBody>
@@ -10318,7 +10318,7 @@
                           </a:solidFill>
                           <a:latin typeface="Roboto"/>
                         </a:rPr>
-                        <a:t>66.2%</a:t>
+                        <a:t>69.3%</a:t>
                       </a:r>
                     </a:p>
                   </a:txBody>
@@ -10374,7 +10374,7 @@
                           </a:solidFill>
                           <a:latin typeface="Roboto"/>
                         </a:rPr>
-                        <a:t>$50,200</a:t>
+                        <a:t>$55,100</a:t>
                       </a:r>
                     </a:p>
                   </a:txBody>
@@ -10455,7 +10455,7 @@
                           </a:solidFill>
                           <a:latin typeface="Roboto"/>
                         </a:rPr>
-                        <a:t>$38,020</a:t>
+                        <a:t>$42,920</a:t>
                       </a:r>
                     </a:p>
                   </a:txBody>
@@ -10482,7 +10482,7 @@
                           </a:solidFill>
                           <a:latin typeface="Roboto"/>
                         </a:rPr>
-                        <a:t>75.7%</a:t>
+                        <a:t>77.9%</a:t>
                       </a:r>
                     </a:p>
                   </a:txBody>
@@ -10538,7 +10538,7 @@
                           </a:solidFill>
                           <a:latin typeface="Roboto"/>
                         </a:rPr>
-                        <a:t>$524,320</a:t>
+                        <a:t>$578,275</a:t>
                       </a:r>
                     </a:p>
                   </a:txBody>
@@ -10619,7 +10619,7 @@
                           </a:solidFill>
                           <a:latin typeface="Roboto"/>
                         </a:rPr>
-                        <a:t>$336,140</a:t>
+                        <a:t>$390,095</a:t>
                       </a:r>
                     </a:p>
                   </a:txBody>
@@ -10646,7 +10646,7 @@
                           </a:solidFill>
                           <a:latin typeface="Roboto"/>
                         </a:rPr>
-                        <a:t>64.1%</a:t>
+                        <a:t>67.5%</a:t>
                       </a:r>
                     </a:p>
                   </a:txBody>
@@ -10734,7 +10734,7 @@
                 </a:solidFill>
                 <a:latin typeface="Roboto"/>
               </a:rPr>
-              <a:t>Data retrieved 2pm, Tue 6 Oct 2026 · Generated 8 Oct 2026, 9:35am · Sample data · Made with Python (python-pptx)</a:t>
+              <a:t>Data retrieved 2pm, Tue 6 Oct 2026 · Generated 9 Oct 2026, 8:41am · Sample data · Made with Python (python-pptx)</a:t>
             </a:r>
           </a:p>
         </p:txBody>
